--- a/ゲーム科2年/00_前期/ゲームエンジンⅢ/Unity_HDRP/04_HDデカール.pptx
+++ b/ゲーム科2年/00_前期/ゲームエンジンⅢ/Unity_HDRP/04_HDデカール.pptx
@@ -5076,7 +5076,7 @@
           <a:p>
             <a:r>
               <a:rPr lang="ja-JP" altLang="en-US" sz="2400" dirty="0"/>
-              <a:t>ゲーム中に発生する血だまりや弾痕も一定時間たつと消えるようになってます。</a:t>
+              <a:t>ゲーム中に発生する血だまりや弾痕も一定時間経つと消えるようになってます。</a:t>
             </a:r>
             <a:endParaRPr lang="en-US" altLang="ja-JP" sz="2400" dirty="0"/>
           </a:p>
